--- a/lighting_tool/drawings/27PR_二层照明施工图_RevK-B_国标.pptx
+++ b/lighting_tool/drawings/27PR_二层照明施工图_RevK-B_国标.pptx
@@ -15639,7 +15639,7 @@
         <p:spPr>
           <a:xfrm>
             <a:off x="2251820" y="3896282"/>
-            <a:ext cx="953072" cy="0"/>
+            <a:ext cx="746448" cy="0"/>
           </a:xfrm>
           <a:prstGeom prst="line">
             <a:avLst/>
@@ -15673,7 +15673,7 @@
         </p:nvCxnSpPr>
         <p:spPr>
           <a:xfrm flipV="1">
-            <a:off x="3204892" y="3435311"/>
+            <a:off x="2998268" y="3435311"/>
             <a:ext cx="0" cy="460971"/>
           </a:xfrm>
           <a:prstGeom prst="line">
@@ -15708,8 +15708,8 @@
         </p:nvCxnSpPr>
         <p:spPr>
           <a:xfrm>
-            <a:off x="3204892" y="3435311"/>
-            <a:ext cx="392723" cy="0"/>
+            <a:off x="2998268" y="3435311"/>
+            <a:ext cx="599347" cy="0"/>
           </a:xfrm>
           <a:prstGeom prst="line">
             <a:avLst/>
@@ -16691,9 +16691,9 @@
           <p:nvPr/>
         </p:nvCxnSpPr>
         <p:spPr>
-          <a:xfrm flipH="1">
-            <a:off x="3018708" y="3435311"/>
-            <a:ext cx="186184" cy="0"/>
+          <a:xfrm flipV="1">
+            <a:off x="2998268" y="2807454"/>
+            <a:ext cx="0" cy="627857"/>
           </a:xfrm>
           <a:prstGeom prst="line">
             <a:avLst/>
@@ -16727,9 +16727,9 @@
           <p:nvPr/>
         </p:nvCxnSpPr>
         <p:spPr>
-          <a:xfrm flipV="1">
-            <a:off x="3018708" y="2807454"/>
-            <a:ext cx="0" cy="627857"/>
+          <a:xfrm>
+            <a:off x="2998268" y="2807454"/>
+            <a:ext cx="20440" cy="0"/>
           </a:xfrm>
           <a:prstGeom prst="line">
             <a:avLst/>
@@ -17844,8 +17844,8 @@
         </p:nvCxnSpPr>
         <p:spPr>
           <a:xfrm flipV="1">
-            <a:off x="3204892" y="3123076"/>
-            <a:ext cx="392723" cy="312235"/>
+            <a:off x="2998268" y="3123076"/>
+            <a:ext cx="599347" cy="312235"/>
           </a:xfrm>
           <a:prstGeom prst="line">
             <a:avLst/>
@@ -20661,7 +20661,7 @@
         </p:nvSpPr>
         <p:spPr>
           <a:xfrm>
-            <a:off x="3190646" y="3421065"/>
+            <a:off x="2984022" y="3421065"/>
             <a:ext cx="28492" cy="28492"/>
           </a:xfrm>
           <a:prstGeom prst="ellipse">
@@ -20705,7 +20705,7 @@
         </p:nvCxnSpPr>
         <p:spPr>
           <a:xfrm flipV="1">
-            <a:off x="3204892" y="3381586"/>
+            <a:off x="2998268" y="3381586"/>
             <a:ext cx="53726" cy="53725"/>
           </a:xfrm>
           <a:prstGeom prst="line">
@@ -20740,8 +20740,8 @@
         </p:nvCxnSpPr>
         <p:spPr>
           <a:xfrm>
-            <a:off x="3258618" y="3381586"/>
-            <a:ext cx="13431" cy="13431"/>
+            <a:off x="3051994" y="3381586"/>
+            <a:ext cx="13432" cy="13431"/>
           </a:xfrm>
           <a:prstGeom prst="line">
             <a:avLst/>
@@ -20775,7 +20775,7 @@
         </p:nvCxnSpPr>
         <p:spPr>
           <a:xfrm flipH="1">
-            <a:off x="3164598" y="3435311"/>
+            <a:off x="2957974" y="3435311"/>
             <a:ext cx="40294" cy="40295"/>
           </a:xfrm>
           <a:prstGeom prst="line">
@@ -20810,8 +20810,8 @@
         </p:nvCxnSpPr>
         <p:spPr>
           <a:xfrm flipH="1" flipV="1">
-            <a:off x="3151166" y="3462174"/>
-            <a:ext cx="13432" cy="13432"/>
+            <a:off x="2944543" y="3462174"/>
+            <a:ext cx="13431" cy="13432"/>
           </a:xfrm>
           <a:prstGeom prst="line">
             <a:avLst/>
@@ -20845,7 +20845,7 @@
         </p:nvSpPr>
         <p:spPr>
           <a:xfrm>
-            <a:off x="3266532" y="3318269"/>
+            <a:off x="3059909" y="3318269"/>
             <a:ext cx="600000" cy="150000"/>
           </a:xfrm>
           <a:prstGeom prst="rect">
@@ -31842,7 +31842,7 @@
         <p:spPr>
           <a:xfrm>
             <a:off x="3288263" y="3902631"/>
-            <a:ext cx="1392217" cy="0"/>
+            <a:ext cx="1090388" cy="0"/>
           </a:xfrm>
           <a:prstGeom prst="line">
             <a:avLst/>
@@ -31876,7 +31876,7 @@
         </p:nvCxnSpPr>
         <p:spPr>
           <a:xfrm flipV="1">
-            <a:off x="4680480" y="3229260"/>
+            <a:off x="4378651" y="3229260"/>
             <a:ext cx="0" cy="673371"/>
           </a:xfrm>
           <a:prstGeom prst="line">
@@ -31911,8 +31911,8 @@
         </p:nvCxnSpPr>
         <p:spPr>
           <a:xfrm>
-            <a:off x="4680480" y="3229260"/>
-            <a:ext cx="573677" cy="0"/>
+            <a:off x="4378651" y="3229260"/>
+            <a:ext cx="875506" cy="0"/>
           </a:xfrm>
           <a:prstGeom prst="line">
             <a:avLst/>
@@ -31981,7 +31981,7 @@
         </p:nvCxnSpPr>
         <p:spPr>
           <a:xfrm>
-            <a:off x="4680480" y="3229260"/>
+            <a:off x="4378651" y="3229260"/>
             <a:ext cx="0" cy="1412108"/>
           </a:xfrm>
           <a:prstGeom prst="line">
@@ -32016,8 +32016,8 @@
         </p:nvCxnSpPr>
         <p:spPr>
           <a:xfrm>
-            <a:off x="4680480" y="4641368"/>
-            <a:ext cx="347783" cy="0"/>
+            <a:off x="4378651" y="4641368"/>
+            <a:ext cx="649612" cy="0"/>
           </a:xfrm>
           <a:prstGeom prst="line">
             <a:avLst/>
@@ -32439,9 +32439,9 @@
           <p:nvPr/>
         </p:nvCxnSpPr>
         <p:spPr>
-          <a:xfrm flipH="1">
-            <a:off x="4408508" y="3229260"/>
-            <a:ext cx="271972" cy="0"/>
+          <a:xfrm flipV="1">
+            <a:off x="4378651" y="2312106"/>
+            <a:ext cx="0" cy="917154"/>
           </a:xfrm>
           <a:prstGeom prst="line">
             <a:avLst/>
@@ -32475,9 +32475,9 @@
           <p:nvPr/>
         </p:nvCxnSpPr>
         <p:spPr>
-          <a:xfrm flipV="1">
-            <a:off x="4408508" y="2312106"/>
-            <a:ext cx="0" cy="917154"/>
+          <a:xfrm>
+            <a:off x="4378651" y="2312106"/>
+            <a:ext cx="29857" cy="0"/>
           </a:xfrm>
           <a:prstGeom prst="line">
             <a:avLst/>
@@ -33016,8 +33016,8 @@
         </p:nvCxnSpPr>
         <p:spPr>
           <a:xfrm flipV="1">
-            <a:off x="4680480" y="2773157"/>
-            <a:ext cx="573677" cy="456103"/>
+            <a:off x="4378651" y="2773157"/>
+            <a:ext cx="875506" cy="456103"/>
           </a:xfrm>
           <a:prstGeom prst="line">
             <a:avLst/>
@@ -34756,7 +34756,7 @@
         </p:nvSpPr>
         <p:spPr>
           <a:xfrm>
-            <a:off x="4655045" y="3203825"/>
+            <a:off x="4353216" y="3203825"/>
             <a:ext cx="50869" cy="50869"/>
           </a:xfrm>
           <a:prstGeom prst="ellipse">
@@ -34800,7 +34800,7 @@
         </p:nvCxnSpPr>
         <p:spPr>
           <a:xfrm flipV="1">
-            <a:off x="4680480" y="3133339"/>
+            <a:off x="4378651" y="3133339"/>
             <a:ext cx="95921" cy="95921"/>
           </a:xfrm>
           <a:prstGeom prst="line">
@@ -34835,8 +34835,8 @@
         </p:nvCxnSpPr>
         <p:spPr>
           <a:xfrm>
-            <a:off x="4776401" y="3133339"/>
-            <a:ext cx="23980" cy="23981"/>
+            <a:off x="4474572" y="3133339"/>
+            <a:ext cx="23981" cy="23981"/>
           </a:xfrm>
           <a:prstGeom prst="line">
             <a:avLst/>
@@ -34870,7 +34870,7 @@
         </p:nvCxnSpPr>
         <p:spPr>
           <a:xfrm flipH="1">
-            <a:off x="4608539" y="3229260"/>
+            <a:off x="4306710" y="3229260"/>
             <a:ext cx="71941" cy="71941"/>
           </a:xfrm>
           <a:prstGeom prst="line">
@@ -34905,7 +34905,7 @@
         </p:nvCxnSpPr>
         <p:spPr>
           <a:xfrm flipH="1" flipV="1">
-            <a:off x="4584559" y="3277221"/>
+            <a:off x="4282730" y="3277221"/>
             <a:ext cx="23980" cy="23980"/>
           </a:xfrm>
           <a:prstGeom prst="line">
@@ -34940,7 +34940,7 @@
         </p:nvSpPr>
         <p:spPr>
           <a:xfrm>
-            <a:off x="4790532" y="3020295"/>
+            <a:off x="4488703" y="3020295"/>
             <a:ext cx="600000" cy="150000"/>
           </a:xfrm>
           <a:prstGeom prst="rect">
@@ -36083,7 +36083,7 @@
                 </a:solidFill>
                 <a:latin typeface="Microsoft YaHei"/>
               </a:rPr>
-              <a:t>S3  主卧南墙（衣帽间那面墙）主卧一侧，C19 西侧</a:t>
+              <a:t>S3  主卧南墙（衣帽间那面墙）主卧一侧，墙中间</a:t>
             </a:r>
           </a:p>
         </p:txBody>
@@ -52485,7 +52485,7 @@
                           </a:solidFill>
                           <a:latin typeface="Microsoft YaHei"/>
                         </a:rPr>
-                        <a:t>主卧南墙（衣帽间那面墙）主卧一侧，C19 西侧</a:t>
+                        <a:t>主卧南墙（衣帽间那面墙）主卧一侧，墙中间</a:t>
                       </a:r>
                     </a:p>
                   </a:txBody>

--- a/lighting_tool/drawings/27PR_二层照明施工图_RevK-B_国标.pptx
+++ b/lighting_tool/drawings/27PR_二层照明施工图_RevK-B_国标.pptx
@@ -4155,7 +4155,7 @@
                 </a:solidFill>
                 <a:latin typeface="Microsoft YaHei"/>
               </a:rPr>
-              <a:t>12. Rev K：主卧灯开关 S3 挪回主卧南墙（C19 西侧）；卧室 2 门旁开关 S7 改装在短墙的卧室 2 一侧。按键不变。</a:t>
+              <a:t>12. Rev K（2026-10-08）：排气扇只装无窗的卧室 4 套卫（经烟囱排风）；北卫、西卫有窗，不装。</a:t>
             </a:r>
           </a:p>
           <a:p>
@@ -4167,7 +4167,19 @@
                 </a:solidFill>
                 <a:latin typeface="Microsoft YaHei"/>
               </a:rPr>
-              <a:t>13. 本套图：方案 B · 精简 17 路，全屋照明 3 路（WL1 一层照明 / WL3 户外照明 / WL4 二层照明）。两个方案的灯、开关和联动完全相同，只是照明回路分组不同；插座与专线见网页「配电箱」页。</a:t>
+              <a:t>13. Rev K：主卧灯开关 S3 挪到主卧南墙中间；卧室 2 门旁开关 S7 改装在短墙的卧室 2 一侧。按键不变。</a:t>
+            </a:r>
+          </a:p>
+          <a:p>
+            <a:pPr algn="l"/>
+            <a:r>
+              <a:rPr sz="750" b="0">
+                <a:solidFill>
+                  <a:srgbClr val="1A1A1A"/>
+                </a:solidFill>
+                <a:latin typeface="Microsoft YaHei"/>
+              </a:rPr>
+              <a:t>14. 本套图：方案 B · 精简 17 路，全屋照明 3 路（WL1 一层照明 / WL3 户外照明 / WL4 二层照明）。两个方案的灯、开关和联动完全相同，只是照明回路分组不同；插座与专线见网页「配电箱」页。</a:t>
             </a:r>
           </a:p>
         </p:txBody>
@@ -15639,7 +15651,7 @@
         <p:spPr>
           <a:xfrm>
             <a:off x="2251820" y="3896282"/>
-            <a:ext cx="746448" cy="0"/>
+            <a:ext cx="1168488" cy="0"/>
           </a:xfrm>
           <a:prstGeom prst="line">
             <a:avLst/>
@@ -15673,7 +15685,7 @@
         </p:nvCxnSpPr>
         <p:spPr>
           <a:xfrm flipV="1">
-            <a:off x="2998268" y="3435311"/>
+            <a:off x="3420308" y="3435311"/>
             <a:ext cx="0" cy="460971"/>
           </a:xfrm>
           <a:prstGeom prst="line">
@@ -15707,9 +15719,9 @@
           <p:nvPr/>
         </p:nvCxnSpPr>
         <p:spPr>
-          <a:xfrm>
-            <a:off x="2998268" y="3435311"/>
-            <a:ext cx="599347" cy="0"/>
+          <a:xfrm flipV="1">
+            <a:off x="3420308" y="3123076"/>
+            <a:ext cx="0" cy="312235"/>
           </a:xfrm>
           <a:prstGeom prst="line">
             <a:avLst/>
@@ -15742,9 +15754,9 @@
           <p:nvPr/>
         </p:nvCxnSpPr>
         <p:spPr>
-          <a:xfrm flipV="1">
-            <a:off x="3597615" y="3123076"/>
-            <a:ext cx="0" cy="312235"/>
+          <a:xfrm>
+            <a:off x="3420308" y="3123076"/>
+            <a:ext cx="177307" cy="0"/>
           </a:xfrm>
           <a:prstGeom prst="line">
             <a:avLst/>
@@ -15778,8 +15790,8 @@
         </p:nvCxnSpPr>
         <p:spPr>
           <a:xfrm>
-            <a:off x="3597615" y="3123076"/>
-            <a:ext cx="0" cy="476462"/>
+            <a:off x="3420308" y="3435311"/>
+            <a:ext cx="632871" cy="0"/>
           </a:xfrm>
           <a:prstGeom prst="line">
             <a:avLst/>
@@ -15813,8 +15825,8 @@
         </p:nvCxnSpPr>
         <p:spPr>
           <a:xfrm>
-            <a:off x="3597615" y="3599538"/>
-            <a:ext cx="455564" cy="0"/>
+            <a:off x="4053179" y="3435311"/>
+            <a:ext cx="0" cy="164227"/>
           </a:xfrm>
           <a:prstGeom prst="line">
             <a:avLst/>
@@ -16692,7 +16704,7 @@
         </p:nvCxnSpPr>
         <p:spPr>
           <a:xfrm flipV="1">
-            <a:off x="2998268" y="2807454"/>
+            <a:off x="3420308" y="2807454"/>
             <a:ext cx="0" cy="627857"/>
           </a:xfrm>
           <a:prstGeom prst="line">
@@ -16727,9 +16739,9 @@
           <p:nvPr/>
         </p:nvCxnSpPr>
         <p:spPr>
-          <a:xfrm>
-            <a:off x="2998268" y="2807454"/>
-            <a:ext cx="20440" cy="0"/>
+          <a:xfrm flipH="1">
+            <a:off x="3018708" y="2807454"/>
+            <a:ext cx="401600" cy="0"/>
           </a:xfrm>
           <a:prstGeom prst="line">
             <a:avLst/>
@@ -17844,8 +17856,8 @@
         </p:nvCxnSpPr>
         <p:spPr>
           <a:xfrm flipV="1">
-            <a:off x="2998268" y="3123076"/>
-            <a:ext cx="599347" cy="312235"/>
+            <a:off x="3420308" y="3123076"/>
+            <a:ext cx="177307" cy="312235"/>
           </a:xfrm>
           <a:prstGeom prst="line">
             <a:avLst/>
@@ -20661,7 +20673,7 @@
         </p:nvSpPr>
         <p:spPr>
           <a:xfrm>
-            <a:off x="2984022" y="3421065"/>
+            <a:off x="3406062" y="3421065"/>
             <a:ext cx="28492" cy="28492"/>
           </a:xfrm>
           <a:prstGeom prst="ellipse">
@@ -20705,7 +20717,7 @@
         </p:nvCxnSpPr>
         <p:spPr>
           <a:xfrm flipV="1">
-            <a:off x="2998268" y="3381586"/>
+            <a:off x="3420308" y="3381586"/>
             <a:ext cx="53726" cy="53725"/>
           </a:xfrm>
           <a:prstGeom prst="line">
@@ -20740,8 +20752,8 @@
         </p:nvCxnSpPr>
         <p:spPr>
           <a:xfrm>
-            <a:off x="3051994" y="3381586"/>
-            <a:ext cx="13432" cy="13431"/>
+            <a:off x="3474034" y="3381586"/>
+            <a:ext cx="13431" cy="13431"/>
           </a:xfrm>
           <a:prstGeom prst="line">
             <a:avLst/>
@@ -20775,7 +20787,7 @@
         </p:nvCxnSpPr>
         <p:spPr>
           <a:xfrm flipH="1">
-            <a:off x="2957974" y="3435311"/>
+            <a:off x="3380014" y="3435311"/>
             <a:ext cx="40294" cy="40295"/>
           </a:xfrm>
           <a:prstGeom prst="line">
@@ -20810,8 +20822,8 @@
         </p:nvCxnSpPr>
         <p:spPr>
           <a:xfrm flipH="1" flipV="1">
-            <a:off x="2944543" y="3462174"/>
-            <a:ext cx="13431" cy="13432"/>
+            <a:off x="3366582" y="3462174"/>
+            <a:ext cx="13432" cy="13432"/>
           </a:xfrm>
           <a:prstGeom prst="line">
             <a:avLst/>
@@ -20845,7 +20857,7 @@
         </p:nvSpPr>
         <p:spPr>
           <a:xfrm>
-            <a:off x="3059909" y="3318269"/>
+            <a:off x="3481949" y="3318269"/>
             <a:ext cx="600000" cy="150000"/>
           </a:xfrm>
           <a:prstGeom prst="rect">
@@ -31842,7 +31854,7 @@
         <p:spPr>
           <a:xfrm>
             <a:off x="3288263" y="3902631"/>
-            <a:ext cx="1090388" cy="0"/>
+            <a:ext cx="1706890" cy="0"/>
           </a:xfrm>
           <a:prstGeom prst="line">
             <a:avLst/>
@@ -31876,7 +31888,7 @@
         </p:nvCxnSpPr>
         <p:spPr>
           <a:xfrm flipV="1">
-            <a:off x="4378651" y="3229260"/>
+            <a:off x="4995153" y="3229260"/>
             <a:ext cx="0" cy="673371"/>
           </a:xfrm>
           <a:prstGeom prst="line">
@@ -31910,9 +31922,9 @@
           <p:nvPr/>
         </p:nvCxnSpPr>
         <p:spPr>
-          <a:xfrm>
-            <a:off x="4378651" y="3229260"/>
-            <a:ext cx="875506" cy="0"/>
+          <a:xfrm flipV="1">
+            <a:off x="4995153" y="2773157"/>
+            <a:ext cx="0" cy="456103"/>
           </a:xfrm>
           <a:prstGeom prst="line">
             <a:avLst/>
@@ -31945,9 +31957,9 @@
           <p:nvPr/>
         </p:nvCxnSpPr>
         <p:spPr>
-          <a:xfrm flipV="1">
-            <a:off x="5254157" y="2773157"/>
-            <a:ext cx="0" cy="456103"/>
+          <a:xfrm>
+            <a:off x="4995153" y="2773157"/>
+            <a:ext cx="259004" cy="0"/>
           </a:xfrm>
           <a:prstGeom prst="line">
             <a:avLst/>
@@ -31981,7 +31993,7 @@
         </p:nvCxnSpPr>
         <p:spPr>
           <a:xfrm>
-            <a:off x="4378651" y="3229260"/>
+            <a:off x="4995153" y="3229260"/>
             <a:ext cx="0" cy="1412108"/>
           </a:xfrm>
           <a:prstGeom prst="line">
@@ -32016,8 +32028,8 @@
         </p:nvCxnSpPr>
         <p:spPr>
           <a:xfrm>
-            <a:off x="4378651" y="4641368"/>
-            <a:ext cx="649612" cy="0"/>
+            <a:off x="4995153" y="4641368"/>
+            <a:ext cx="33110" cy="0"/>
           </a:xfrm>
           <a:prstGeom prst="line">
             <a:avLst/>
@@ -32440,7 +32452,7 @@
         </p:nvCxnSpPr>
         <p:spPr>
           <a:xfrm flipV="1">
-            <a:off x="4378651" y="2312106"/>
+            <a:off x="4995153" y="2312106"/>
             <a:ext cx="0" cy="917154"/>
           </a:xfrm>
           <a:prstGeom prst="line">
@@ -32475,9 +32487,9 @@
           <p:nvPr/>
         </p:nvCxnSpPr>
         <p:spPr>
-          <a:xfrm>
-            <a:off x="4378651" y="2312106"/>
-            <a:ext cx="29857" cy="0"/>
+          <a:xfrm flipH="1">
+            <a:off x="4408508" y="2312106"/>
+            <a:ext cx="586645" cy="0"/>
           </a:xfrm>
           <a:prstGeom prst="line">
             <a:avLst/>
@@ -33016,8 +33028,8 @@
         </p:nvCxnSpPr>
         <p:spPr>
           <a:xfrm flipV="1">
-            <a:off x="4378651" y="2773157"/>
-            <a:ext cx="875506" cy="456103"/>
+            <a:off x="4995153" y="2773157"/>
+            <a:ext cx="259004" cy="456103"/>
           </a:xfrm>
           <a:prstGeom prst="line">
             <a:avLst/>
@@ -34756,7 +34768,7 @@
         </p:nvSpPr>
         <p:spPr>
           <a:xfrm>
-            <a:off x="4353216" y="3203825"/>
+            <a:off x="4969718" y="3203825"/>
             <a:ext cx="50869" cy="50869"/>
           </a:xfrm>
           <a:prstGeom prst="ellipse">
@@ -34800,8 +34812,8 @@
         </p:nvCxnSpPr>
         <p:spPr>
           <a:xfrm flipV="1">
-            <a:off x="4378651" y="3133339"/>
-            <a:ext cx="95921" cy="95921"/>
+            <a:off x="4995153" y="3133339"/>
+            <a:ext cx="95922" cy="95921"/>
           </a:xfrm>
           <a:prstGeom prst="line">
             <a:avLst/>
@@ -34835,8 +34847,8 @@
         </p:nvCxnSpPr>
         <p:spPr>
           <a:xfrm>
-            <a:off x="4474572" y="3133339"/>
-            <a:ext cx="23981" cy="23981"/>
+            <a:off x="5091075" y="3133339"/>
+            <a:ext cx="23980" cy="23981"/>
           </a:xfrm>
           <a:prstGeom prst="line">
             <a:avLst/>
@@ -34870,8 +34882,8 @@
         </p:nvCxnSpPr>
         <p:spPr>
           <a:xfrm flipH="1">
-            <a:off x="4306710" y="3229260"/>
-            <a:ext cx="71941" cy="71941"/>
+            <a:off x="4923213" y="3229260"/>
+            <a:ext cx="71940" cy="71941"/>
           </a:xfrm>
           <a:prstGeom prst="line">
             <a:avLst/>
@@ -34905,8 +34917,8 @@
         </p:nvCxnSpPr>
         <p:spPr>
           <a:xfrm flipH="1" flipV="1">
-            <a:off x="4282730" y="3277221"/>
-            <a:ext cx="23980" cy="23980"/>
+            <a:off x="4899232" y="3277221"/>
+            <a:ext cx="23981" cy="23980"/>
           </a:xfrm>
           <a:prstGeom prst="line">
             <a:avLst/>
@@ -34940,7 +34952,7 @@
         </p:nvSpPr>
         <p:spPr>
           <a:xfrm>
-            <a:off x="4488703" y="3020295"/>
+            <a:off x="5105205" y="3020295"/>
             <a:ext cx="600000" cy="150000"/>
           </a:xfrm>
           <a:prstGeom prst="rect">
@@ -36083,7 +36095,7 @@
                 </a:solidFill>
                 <a:latin typeface="Microsoft YaHei"/>
               </a:rPr>
-              <a:t>S3  主卧南墙（衣帽间那面墙）主卧一侧，墙中间</a:t>
+              <a:t>S3  主卧床头柜上方（C19 一侧，离地 700，与门口 S4 双控）</a:t>
             </a:r>
           </a:p>
         </p:txBody>
@@ -52485,7 +52497,7 @@
                           </a:solidFill>
                           <a:latin typeface="Microsoft YaHei"/>
                         </a:rPr>
-                        <a:t>主卧南墙（衣帽间那面墙）主卧一侧，墙中间</a:t>
+                        <a:t>主卧床头柜上方（C19 一侧，离地 700，与门口 S4 双控）</a:t>
                       </a:r>
                     </a:p>
                   </a:txBody>
